--- a/presentation/Netflix_Viewership_Analysis_Presentation.pptx
+++ b/presentation/Netflix_Viewership_Analysis_Presentation.pptx
@@ -6609,7 +6609,7 @@
         <p:spPr>
           <a:xfrm>
             <a:off x="5242984" y="1600199"/>
-            <a:ext cx="6684715" cy="3874325"/>
+            <a:ext cx="6684715" cy="3874324"/>
           </a:xfrm>
           <a:prstGeom prst="rect">
             <a:avLst/>
